--- a/Planning docs/Slides/lesson-19-2-teacher-slides.pptx
+++ b/Planning docs/Slides/lesson-19-2-teacher-slides.pptx
@@ -5242,7 +5242,7 @@
                 <a:ea typeface="Calibri" pitchFamily="34" charset="-122"/>
                 <a:cs typeface="Calibri" pitchFamily="34" charset="-120"/>
               </a:rPr>
-              <a:t>•  Good readers look for moments when a character does something unexpected. Watch for a moment where Jemmy does something surprising for someone who hasn't deserved it.</a:t>
+              <a:t>•  Billy wants the note to ask for a wagonload of gold. How does Jemmy make this work in his favor?</a:t>
             </a:r>
             <a:endParaRPr lang="en-US" sz="1500" dirty="0"/>
           </a:p>
@@ -5259,24 +5259,7 @@
                 <a:ea typeface="Calibri" pitchFamily="34" charset="-122"/>
                 <a:cs typeface="Calibri" pitchFamily="34" charset="-120"/>
               </a:rPr>
-              <a:t>•  Count the syllables in each line of both haiku. Then find the word in each one where things change.</a:t>
-            </a:r>
-            <a:endParaRPr lang="en-US" sz="1500" dirty="0"/>
-          </a:p>
-          <a:p>
-            <a:pPr indent="0" marL="0">
-              <a:buNone/>
-            </a:pPr>
-            <a:r>
-              <a:rPr lang="en-US" sz="1500" dirty="0">
-                <a:solidFill>
-                  <a:srgbClr val="1E293B"/>
-                </a:solidFill>
-                <a:latin typeface="Calibri" pitchFamily="34" charset="0"/>
-                <a:ea typeface="Calibri" pitchFamily="34" charset="-122"/>
-                <a:cs typeface="Calibri" pitchFamily="34" charset="-120"/>
-              </a:rPr>
-              <a:t>•  Look at the letters around the dot in each word. Count: vowel, consonant, consonant, vowel. That's the VCCV pattern .</a:t>
+              <a:t>•  Jemmy hides a trick inside the note. What is his plan, and why can't Billy figure it out?</a:t>
             </a:r>
             <a:endParaRPr lang="en-US" sz="1500" dirty="0"/>
           </a:p>
